--- a/material/3_데이터분석/10_웹자동화_selenium.pptx
+++ b/material/3_데이터분석/10_웹자동화_selenium.pptx
@@ -41,29 +41,29 @@
   <p:notesSz cx="6858000" cy="9144000"/>
   <p:embeddedFontLst>
     <p:embeddedFont>
-      <p:font typeface="G마켓 산스 TTF Bold" panose="02000000000000000000" pitchFamily="2" charset="-127"/>
-      <p:bold r:id="rId31"/>
+      <p:font typeface="Kim jung chul Gothic Regular" panose="020B0600000101010101" charset="-127"/>
+      <p:regular r:id="rId31"/>
     </p:embeddedFont>
     <p:embeddedFont>
-      <p:font typeface="Kim jung chul Gothic Regular" panose="020B0503000000000000" pitchFamily="50" charset="-127"/>
+      <p:font typeface="메이플스토리" panose="020B0600000101010101" charset="-127"/>
       <p:regular r:id="rId32"/>
-    </p:embeddedFont>
-    <p:embeddedFont>
-      <p:font typeface="Pretendard Black" panose="02000A03000000020004" pitchFamily="2" charset="-127"/>
       <p:bold r:id="rId33"/>
     </p:embeddedFont>
     <p:embeddedFont>
-      <p:font typeface="Pretendard Light" panose="02000403000000020004" pitchFamily="2" charset="-127"/>
-      <p:regular r:id="rId34"/>
+      <p:font typeface="G마켓 산스 TTF Bold" panose="02000000000000000000" pitchFamily="2" charset="-127"/>
+      <p:bold r:id="rId34"/>
     </p:embeddedFont>
     <p:embeddedFont>
-      <p:font typeface="Pretendard Medium" panose="02000603000000020004" pitchFamily="2" charset="-127"/>
-      <p:regular r:id="rId35"/>
+      <p:font typeface="Pretendard Black" panose="02000A03000000020004" pitchFamily="50" charset="-127"/>
+      <p:bold r:id="rId35"/>
     </p:embeddedFont>
     <p:embeddedFont>
-      <p:font typeface="메이플스토리" panose="02000300000000000000" pitchFamily="2" charset="-127"/>
+      <p:font typeface="Pretendard Light" panose="02000403000000020004" pitchFamily="50" charset="-127"/>
       <p:regular r:id="rId36"/>
-      <p:bold r:id="rId37"/>
+    </p:embeddedFont>
+    <p:embeddedFont>
+      <p:font typeface="Pretendard Medium" panose="02000603000000020004" pitchFamily="50" charset="-127"/>
+      <p:regular r:id="rId37"/>
     </p:embeddedFont>
   </p:embeddedFontLst>
   <p:defaultTextStyle>
@@ -272,7 +272,7 @@
             <a:fld id="{A13A867C-D490-40C2-AB8D-A60FA70A9BF5}" type="datetimeFigureOut">
               <a:rPr lang="ko-KR" altLang="en-US" smtClean="0"/>
               <a:pPr/>
-              <a:t>2025-09-01</a:t>
+              <a:t>2025-12-12</a:t>
             </a:fld>
             <a:endParaRPr lang="ko-KR" altLang="en-US" dirty="0"/>
           </a:p>
@@ -1096,7 +1096,7 @@
           <a:p>
             <a:fld id="{442BEE3F-2E9A-4FD8-8B8A-8619F3E161C0}" type="datetime1">
               <a:rPr lang="ko-KR" altLang="en-US" smtClean="0"/>
-              <a:t>2025-09-01</a:t>
+              <a:t>2025-12-12</a:t>
             </a:fld>
             <a:endParaRPr lang="ko-KR" altLang="en-US"/>
           </a:p>
@@ -1383,7 +1383,7 @@
           <a:p>
             <a:fld id="{0F78D9C4-20C1-4B15-A116-16DC77AD9A1E}" type="datetime1">
               <a:rPr lang="ko-KR" altLang="en-US" smtClean="0"/>
-              <a:t>2025-09-01</a:t>
+              <a:t>2025-12-12</a:t>
             </a:fld>
             <a:endParaRPr lang="ko-KR" altLang="en-US"/>
           </a:p>
@@ -1558,7 +1558,7 @@
           <a:p>
             <a:fld id="{7F5E23C3-0E3D-4E4E-8486-D7FB4C073DC1}" type="datetime1">
               <a:rPr lang="ko-KR" altLang="en-US" smtClean="0"/>
-              <a:t>2025-09-01</a:t>
+              <a:t>2025-12-12</a:t>
             </a:fld>
             <a:endParaRPr lang="ko-KR" altLang="en-US"/>
           </a:p>
@@ -1887,7 +1887,7 @@
           <a:p>
             <a:fld id="{7F5E23C3-0E3D-4E4E-8486-D7FB4C073DC1}" type="datetime1">
               <a:rPr lang="ko-KR" altLang="en-US" smtClean="0"/>
-              <a:t>2025-09-01</a:t>
+              <a:t>2025-12-12</a:t>
             </a:fld>
             <a:endParaRPr lang="ko-KR" altLang="en-US"/>
           </a:p>
@@ -3558,126 +3558,6 @@
           </a:p>
         </p:txBody>
       </p:sp>
-      <p:sp>
-        <p:nvSpPr>
-          <p:cNvPr id="9" name="TextBox 8">
-            <a:extLst>
-              <a:ext uri="{FF2B5EF4-FFF2-40B4-BE49-F238E27FC236}">
-                <a16:creationId xmlns:a16="http://schemas.microsoft.com/office/drawing/2014/main" id="{08A50308-6267-3A6D-E809-44CEECBE813E}"/>
-              </a:ext>
-            </a:extLst>
-          </p:cNvPr>
-          <p:cNvSpPr txBox="1"/>
-          <p:nvPr/>
-        </p:nvSpPr>
-        <p:spPr>
-          <a:xfrm>
-            <a:off x="2469548" y="4293645"/>
-            <a:ext cx="6860608" cy="962508"/>
-          </a:xfrm>
-          <a:prstGeom prst="rect">
-            <a:avLst/>
-          </a:prstGeom>
-          <a:noFill/>
-        </p:spPr>
-        <p:txBody>
-          <a:bodyPr wrap="square">
-            <a:spAutoFit/>
-          </a:bodyPr>
-          <a:lstStyle/>
-          <a:p>
-            <a:pPr>
-              <a:lnSpc>
-                <a:spcPct val="150000"/>
-              </a:lnSpc>
-            </a:pPr>
-            <a:r>
-              <a:rPr lang="ko-KR" altLang="en-US" sz="2000" dirty="0">
-                <a:latin typeface="Pretendard Light" panose="02000403000000020004" pitchFamily="2" charset="-127"/>
-                <a:ea typeface="Pretendard Light" panose="02000403000000020004" pitchFamily="2" charset="-127"/>
-                <a:cs typeface="Pretendard Light" panose="02000403000000020004" pitchFamily="2" charset="-127"/>
-              </a:rPr>
-              <a:t>✔️ </a:t>
-            </a:r>
-            <a:r>
-              <a:rPr lang="en-US" altLang="ko-KR" sz="2000" dirty="0" err="1">
-                <a:latin typeface="Pretendard Light" panose="02000403000000020004" pitchFamily="2" charset="-127"/>
-                <a:ea typeface="Pretendard Light" panose="02000403000000020004" pitchFamily="2" charset="-127"/>
-                <a:cs typeface="Pretendard Light" panose="02000403000000020004" pitchFamily="2" charset="-127"/>
-              </a:rPr>
-              <a:t>driver.get</a:t>
-            </a:r>
-            <a:r>
-              <a:rPr lang="en-US" altLang="ko-KR" sz="2000" dirty="0">
-                <a:latin typeface="Pretendard Light" panose="02000403000000020004" pitchFamily="2" charset="-127"/>
-                <a:ea typeface="Pretendard Light" panose="02000403000000020004" pitchFamily="2" charset="-127"/>
-                <a:cs typeface="Pretendard Light" panose="02000403000000020004" pitchFamily="2" charset="-127"/>
-              </a:rPr>
-              <a:t>(</a:t>
-            </a:r>
-            <a:r>
-              <a:rPr lang="en-US" altLang="ko-KR" sz="2000" dirty="0" err="1">
-                <a:latin typeface="Pretendard Light" panose="02000403000000020004" pitchFamily="2" charset="-127"/>
-                <a:ea typeface="Pretendard Light" panose="02000403000000020004" pitchFamily="2" charset="-127"/>
-                <a:cs typeface="Pretendard Light" panose="02000403000000020004" pitchFamily="2" charset="-127"/>
-              </a:rPr>
-              <a:t>url</a:t>
-            </a:r>
-            <a:r>
-              <a:rPr lang="en-US" altLang="ko-KR" sz="2000" dirty="0">
-                <a:latin typeface="Pretendard Light" panose="02000403000000020004" pitchFamily="2" charset="-127"/>
-                <a:ea typeface="Pretendard Light" panose="02000403000000020004" pitchFamily="2" charset="-127"/>
-                <a:cs typeface="Pretendard Light" panose="02000403000000020004" pitchFamily="2" charset="-127"/>
-              </a:rPr>
-              <a:t>) : </a:t>
-            </a:r>
-            <a:r>
-              <a:rPr lang="ko-KR" altLang="en-US" sz="2000" dirty="0">
-                <a:latin typeface="Pretendard Light" panose="02000403000000020004" pitchFamily="2" charset="-127"/>
-                <a:ea typeface="Pretendard Light" panose="02000403000000020004" pitchFamily="2" charset="-127"/>
-                <a:cs typeface="Pretendard Light" panose="02000403000000020004" pitchFamily="2" charset="-127"/>
-              </a:rPr>
-              <a:t>해당 </a:t>
-            </a:r>
-            <a:r>
-              <a:rPr lang="en-US" altLang="ko-KR" sz="2000" dirty="0">
-                <a:latin typeface="Pretendard Light" panose="02000403000000020004" pitchFamily="2" charset="-127"/>
-                <a:ea typeface="Pretendard Light" panose="02000403000000020004" pitchFamily="2" charset="-127"/>
-                <a:cs typeface="Pretendard Light" panose="02000403000000020004" pitchFamily="2" charset="-127"/>
-              </a:rPr>
-              <a:t>URL</a:t>
-            </a:r>
-            <a:r>
-              <a:rPr lang="ko-KR" altLang="en-US" sz="2000" dirty="0">
-                <a:latin typeface="Pretendard Light" panose="02000403000000020004" pitchFamily="2" charset="-127"/>
-                <a:ea typeface="Pretendard Light" panose="02000403000000020004" pitchFamily="2" charset="-127"/>
-                <a:cs typeface="Pretendard Light" panose="02000403000000020004" pitchFamily="2" charset="-127"/>
-              </a:rPr>
-              <a:t>로 이동</a:t>
-            </a:r>
-          </a:p>
-          <a:p>
-            <a:pPr>
-              <a:lnSpc>
-                <a:spcPct val="150000"/>
-              </a:lnSpc>
-            </a:pPr>
-            <a:r>
-              <a:rPr lang="ko-KR" altLang="en-US" sz="2000" dirty="0">
-                <a:latin typeface="Pretendard Light" panose="02000403000000020004" pitchFamily="2" charset="-127"/>
-                <a:ea typeface="Pretendard Light" panose="02000403000000020004" pitchFamily="2" charset="-127"/>
-                <a:cs typeface="Pretendard Light" panose="02000403000000020004" pitchFamily="2" charset="-127"/>
-              </a:rPr>
-              <a:t>✔️ 페이지 로딩이 완료될 때까지 기다린 후 다음 코드 실행</a:t>
-            </a:r>
-            <a:endParaRPr lang="en-US" altLang="ko-KR" sz="2000" dirty="0">
-              <a:latin typeface="Pretendard Light" panose="02000403000000020004" pitchFamily="2" charset="-127"/>
-              <a:ea typeface="Pretendard Light" panose="02000403000000020004" pitchFamily="2" charset="-127"/>
-              <a:cs typeface="Pretendard Light" panose="02000403000000020004" pitchFamily="2" charset="-127"/>
-            </a:endParaRPr>
-          </a:p>
-        </p:txBody>
-      </p:sp>
       <p:pic>
         <p:nvPicPr>
           <p:cNvPr id="3" name="그림 2" descr="스크린샷, 텍스트이(가) 표시된 사진&#10;&#10;AI 생성 콘텐츠는 정확하지 않을 수 있습니다.">
@@ -3715,6 +3595,153 @@
           </a:prstGeom>
         </p:spPr>
       </p:pic>
+      <p:sp>
+        <p:nvSpPr>
+          <p:cNvPr id="2" name="TextBox 1">
+            <a:extLst>
+              <a:ext uri="{FF2B5EF4-FFF2-40B4-BE49-F238E27FC236}">
+                <a16:creationId xmlns:a16="http://schemas.microsoft.com/office/drawing/2014/main" id="{CBE1CE67-C2DF-C73B-0623-C4ECE8C22779}"/>
+              </a:ext>
+            </a:extLst>
+          </p:cNvPr>
+          <p:cNvSpPr txBox="1"/>
+          <p:nvPr/>
+        </p:nvSpPr>
+        <p:spPr>
+          <a:xfrm>
+            <a:off x="2469548" y="4293645"/>
+            <a:ext cx="6860608" cy="961674"/>
+          </a:xfrm>
+          <a:prstGeom prst="rect">
+            <a:avLst/>
+          </a:prstGeom>
+          <a:noFill/>
+        </p:spPr>
+        <p:txBody>
+          <a:bodyPr wrap="square">
+            <a:spAutoFit/>
+          </a:bodyPr>
+          <a:lstStyle/>
+          <a:p>
+            <a:pPr>
+              <a:lnSpc>
+                <a:spcPct val="150000"/>
+              </a:lnSpc>
+            </a:pPr>
+            <a:r>
+              <a:rPr lang="ko-KR" altLang="en-US" sz="2000" dirty="0">
+                <a:latin typeface="Pretendard Light" panose="02000403000000020004" pitchFamily="2" charset="-127"/>
+                <a:ea typeface="Pretendard Light" panose="02000403000000020004" pitchFamily="2" charset="-127"/>
+                <a:cs typeface="Pretendard Light" panose="02000403000000020004" pitchFamily="2" charset="-127"/>
+              </a:rPr>
+              <a:t>✔️ </a:t>
+            </a:r>
+            <a:r>
+              <a:rPr lang="en-US" altLang="ko-KR" sz="2000" dirty="0" err="1">
+                <a:latin typeface="Pretendard Light" panose="02000403000000020004" pitchFamily="2" charset="-127"/>
+                <a:ea typeface="Pretendard Light" panose="02000403000000020004" pitchFamily="2" charset="-127"/>
+                <a:cs typeface="Pretendard Light" panose="02000403000000020004" pitchFamily="2" charset="-127"/>
+              </a:rPr>
+              <a:t>driver.quit</a:t>
+            </a:r>
+            <a:r>
+              <a:rPr lang="en-US" altLang="ko-KR" sz="2000" dirty="0">
+                <a:latin typeface="Pretendard Light" panose="02000403000000020004" pitchFamily="2" charset="-127"/>
+                <a:ea typeface="Pretendard Light" panose="02000403000000020004" pitchFamily="2" charset="-127"/>
+                <a:cs typeface="Pretendard Light" panose="02000403000000020004" pitchFamily="2" charset="-127"/>
+              </a:rPr>
+              <a:t>() : </a:t>
+            </a:r>
+            <a:r>
+              <a:rPr lang="ko-KR" altLang="en-US" sz="2000" dirty="0">
+                <a:latin typeface="Pretendard Light" panose="02000403000000020004" pitchFamily="2" charset="-127"/>
+                <a:ea typeface="Pretendard Light" panose="02000403000000020004" pitchFamily="2" charset="-127"/>
+                <a:cs typeface="Pretendard Light" panose="02000403000000020004" pitchFamily="2" charset="-127"/>
+              </a:rPr>
+              <a:t>현재 열린 모든 브라우저 창 종료 </a:t>
+            </a:r>
+            <a:r>
+              <a:rPr lang="en-US" altLang="ko-KR" sz="2000" dirty="0">
+                <a:latin typeface="Pretendard Light" panose="02000403000000020004" pitchFamily="2" charset="-127"/>
+                <a:ea typeface="Pretendard Light" panose="02000403000000020004" pitchFamily="2" charset="-127"/>
+                <a:cs typeface="Pretendard Light" panose="02000403000000020004" pitchFamily="2" charset="-127"/>
+              </a:rPr>
+              <a:t>+ </a:t>
+            </a:r>
+            <a:r>
+              <a:rPr lang="ko-KR" altLang="en-US" sz="2000" dirty="0">
+                <a:latin typeface="Pretendard Light" panose="02000403000000020004" pitchFamily="2" charset="-127"/>
+                <a:ea typeface="Pretendard Light" panose="02000403000000020004" pitchFamily="2" charset="-127"/>
+                <a:cs typeface="Pretendard Light" panose="02000403000000020004" pitchFamily="2" charset="-127"/>
+              </a:rPr>
+              <a:t>세션 해제</a:t>
+            </a:r>
+          </a:p>
+          <a:p>
+            <a:pPr>
+              <a:lnSpc>
+                <a:spcPct val="150000"/>
+              </a:lnSpc>
+            </a:pPr>
+            <a:r>
+              <a:rPr lang="ko-KR" altLang="en-US" sz="2000" dirty="0">
+                <a:latin typeface="Pretendard Light" panose="02000403000000020004" pitchFamily="2" charset="-127"/>
+                <a:ea typeface="Pretendard Light" panose="02000403000000020004" pitchFamily="2" charset="-127"/>
+                <a:cs typeface="Pretendard Light" panose="02000403000000020004" pitchFamily="2" charset="-127"/>
+              </a:rPr>
+              <a:t>✔️ </a:t>
+            </a:r>
+            <a:r>
+              <a:rPr lang="en-US" altLang="ko-KR" sz="2000" dirty="0" err="1">
+                <a:latin typeface="Pretendard Light" panose="02000403000000020004" pitchFamily="2" charset="-127"/>
+                <a:ea typeface="Pretendard Light" panose="02000403000000020004" pitchFamily="2" charset="-127"/>
+                <a:cs typeface="Pretendard Light" panose="02000403000000020004" pitchFamily="2" charset="-127"/>
+              </a:rPr>
+              <a:t>driver.close</a:t>
+            </a:r>
+            <a:r>
+              <a:rPr lang="en-US" altLang="ko-KR" sz="2000" dirty="0">
+                <a:latin typeface="Pretendard Light" panose="02000403000000020004" pitchFamily="2" charset="-127"/>
+                <a:ea typeface="Pretendard Light" panose="02000403000000020004" pitchFamily="2" charset="-127"/>
+                <a:cs typeface="Pretendard Light" panose="02000403000000020004" pitchFamily="2" charset="-127"/>
+              </a:rPr>
+              <a:t>() : </a:t>
+            </a:r>
+            <a:r>
+              <a:rPr lang="ko-KR" altLang="en-US" sz="2000" dirty="0">
+                <a:latin typeface="Pretendard Light" panose="02000403000000020004" pitchFamily="2" charset="-127"/>
+                <a:ea typeface="Pretendard Light" panose="02000403000000020004" pitchFamily="2" charset="-127"/>
+                <a:cs typeface="Pretendard Light" panose="02000403000000020004" pitchFamily="2" charset="-127"/>
+              </a:rPr>
+              <a:t>현재 활성화된 탭만 닫음 </a:t>
+            </a:r>
+            <a:r>
+              <a:rPr lang="en-US" altLang="ko-KR" sz="2000" dirty="0">
+                <a:latin typeface="Pretendard Light" panose="02000403000000020004" pitchFamily="2" charset="-127"/>
+                <a:ea typeface="Pretendard Light" panose="02000403000000020004" pitchFamily="2" charset="-127"/>
+                <a:cs typeface="Pretendard Light" panose="02000403000000020004" pitchFamily="2" charset="-127"/>
+              </a:rPr>
+              <a:t>(</a:t>
+            </a:r>
+            <a:r>
+              <a:rPr lang="ko-KR" altLang="en-US" sz="2000" dirty="0">
+                <a:latin typeface="Pretendard Light" panose="02000403000000020004" pitchFamily="2" charset="-127"/>
+                <a:ea typeface="Pretendard Light" panose="02000403000000020004" pitchFamily="2" charset="-127"/>
+                <a:cs typeface="Pretendard Light" panose="02000403000000020004" pitchFamily="2" charset="-127"/>
+              </a:rPr>
+              <a:t>다중 탭 제어 시 사용</a:t>
+            </a:r>
+            <a:r>
+              <a:rPr lang="en-US" altLang="ko-KR" sz="2000" dirty="0">
+                <a:latin typeface="Pretendard Light" panose="02000403000000020004" pitchFamily="2" charset="-127"/>
+                <a:ea typeface="Pretendard Light" panose="02000403000000020004" pitchFamily="2" charset="-127"/>
+                <a:cs typeface="Pretendard Light" panose="02000403000000020004" pitchFamily="2" charset="-127"/>
+              </a:rPr>
+              <a:t>)</a:t>
+            </a:r>
+          </a:p>
+        </p:txBody>
+      </p:sp>
     </p:spTree>
     <p:extLst>
       <p:ext uri="{BB962C8B-B14F-4D97-AF65-F5344CB8AC3E}">
@@ -3832,153 +3859,6 @@
           </a:p>
         </p:txBody>
       </p:sp>
-      <p:sp>
-        <p:nvSpPr>
-          <p:cNvPr id="9" name="TextBox 8">
-            <a:extLst>
-              <a:ext uri="{FF2B5EF4-FFF2-40B4-BE49-F238E27FC236}">
-                <a16:creationId xmlns:a16="http://schemas.microsoft.com/office/drawing/2014/main" id="{CBE1CE67-C2DF-C73B-0623-C4ECE8C22779}"/>
-              </a:ext>
-            </a:extLst>
-          </p:cNvPr>
-          <p:cNvSpPr txBox="1"/>
-          <p:nvPr/>
-        </p:nvSpPr>
-        <p:spPr>
-          <a:xfrm>
-            <a:off x="2469548" y="4293645"/>
-            <a:ext cx="6860608" cy="961674"/>
-          </a:xfrm>
-          <a:prstGeom prst="rect">
-            <a:avLst/>
-          </a:prstGeom>
-          <a:noFill/>
-        </p:spPr>
-        <p:txBody>
-          <a:bodyPr wrap="square">
-            <a:spAutoFit/>
-          </a:bodyPr>
-          <a:lstStyle/>
-          <a:p>
-            <a:pPr>
-              <a:lnSpc>
-                <a:spcPct val="150000"/>
-              </a:lnSpc>
-            </a:pPr>
-            <a:r>
-              <a:rPr lang="ko-KR" altLang="en-US" sz="2000" dirty="0">
-                <a:latin typeface="Pretendard Light" panose="02000403000000020004" pitchFamily="2" charset="-127"/>
-                <a:ea typeface="Pretendard Light" panose="02000403000000020004" pitchFamily="2" charset="-127"/>
-                <a:cs typeface="Pretendard Light" panose="02000403000000020004" pitchFamily="2" charset="-127"/>
-              </a:rPr>
-              <a:t>✔️ </a:t>
-            </a:r>
-            <a:r>
-              <a:rPr lang="en-US" altLang="ko-KR" sz="2000" dirty="0" err="1">
-                <a:latin typeface="Pretendard Light" panose="02000403000000020004" pitchFamily="2" charset="-127"/>
-                <a:ea typeface="Pretendard Light" panose="02000403000000020004" pitchFamily="2" charset="-127"/>
-                <a:cs typeface="Pretendard Light" panose="02000403000000020004" pitchFamily="2" charset="-127"/>
-              </a:rPr>
-              <a:t>driver.quit</a:t>
-            </a:r>
-            <a:r>
-              <a:rPr lang="en-US" altLang="ko-KR" sz="2000" dirty="0">
-                <a:latin typeface="Pretendard Light" panose="02000403000000020004" pitchFamily="2" charset="-127"/>
-                <a:ea typeface="Pretendard Light" panose="02000403000000020004" pitchFamily="2" charset="-127"/>
-                <a:cs typeface="Pretendard Light" panose="02000403000000020004" pitchFamily="2" charset="-127"/>
-              </a:rPr>
-              <a:t>() : </a:t>
-            </a:r>
-            <a:r>
-              <a:rPr lang="ko-KR" altLang="en-US" sz="2000" dirty="0">
-                <a:latin typeface="Pretendard Light" panose="02000403000000020004" pitchFamily="2" charset="-127"/>
-                <a:ea typeface="Pretendard Light" panose="02000403000000020004" pitchFamily="2" charset="-127"/>
-                <a:cs typeface="Pretendard Light" panose="02000403000000020004" pitchFamily="2" charset="-127"/>
-              </a:rPr>
-              <a:t>현재 열린 모든 브라우저 창 종료 </a:t>
-            </a:r>
-            <a:r>
-              <a:rPr lang="en-US" altLang="ko-KR" sz="2000" dirty="0">
-                <a:latin typeface="Pretendard Light" panose="02000403000000020004" pitchFamily="2" charset="-127"/>
-                <a:ea typeface="Pretendard Light" panose="02000403000000020004" pitchFamily="2" charset="-127"/>
-                <a:cs typeface="Pretendard Light" panose="02000403000000020004" pitchFamily="2" charset="-127"/>
-              </a:rPr>
-              <a:t>+ </a:t>
-            </a:r>
-            <a:r>
-              <a:rPr lang="ko-KR" altLang="en-US" sz="2000" dirty="0">
-                <a:latin typeface="Pretendard Light" panose="02000403000000020004" pitchFamily="2" charset="-127"/>
-                <a:ea typeface="Pretendard Light" panose="02000403000000020004" pitchFamily="2" charset="-127"/>
-                <a:cs typeface="Pretendard Light" panose="02000403000000020004" pitchFamily="2" charset="-127"/>
-              </a:rPr>
-              <a:t>세션 해제</a:t>
-            </a:r>
-          </a:p>
-          <a:p>
-            <a:pPr>
-              <a:lnSpc>
-                <a:spcPct val="150000"/>
-              </a:lnSpc>
-            </a:pPr>
-            <a:r>
-              <a:rPr lang="ko-KR" altLang="en-US" sz="2000" dirty="0">
-                <a:latin typeface="Pretendard Light" panose="02000403000000020004" pitchFamily="2" charset="-127"/>
-                <a:ea typeface="Pretendard Light" panose="02000403000000020004" pitchFamily="2" charset="-127"/>
-                <a:cs typeface="Pretendard Light" panose="02000403000000020004" pitchFamily="2" charset="-127"/>
-              </a:rPr>
-              <a:t>✔️ </a:t>
-            </a:r>
-            <a:r>
-              <a:rPr lang="en-US" altLang="ko-KR" sz="2000" dirty="0" err="1">
-                <a:latin typeface="Pretendard Light" panose="02000403000000020004" pitchFamily="2" charset="-127"/>
-                <a:ea typeface="Pretendard Light" panose="02000403000000020004" pitchFamily="2" charset="-127"/>
-                <a:cs typeface="Pretendard Light" panose="02000403000000020004" pitchFamily="2" charset="-127"/>
-              </a:rPr>
-              <a:t>driver.close</a:t>
-            </a:r>
-            <a:r>
-              <a:rPr lang="en-US" altLang="ko-KR" sz="2000" dirty="0">
-                <a:latin typeface="Pretendard Light" panose="02000403000000020004" pitchFamily="2" charset="-127"/>
-                <a:ea typeface="Pretendard Light" panose="02000403000000020004" pitchFamily="2" charset="-127"/>
-                <a:cs typeface="Pretendard Light" panose="02000403000000020004" pitchFamily="2" charset="-127"/>
-              </a:rPr>
-              <a:t>() : </a:t>
-            </a:r>
-            <a:r>
-              <a:rPr lang="ko-KR" altLang="en-US" sz="2000" dirty="0">
-                <a:latin typeface="Pretendard Light" panose="02000403000000020004" pitchFamily="2" charset="-127"/>
-                <a:ea typeface="Pretendard Light" panose="02000403000000020004" pitchFamily="2" charset="-127"/>
-                <a:cs typeface="Pretendard Light" panose="02000403000000020004" pitchFamily="2" charset="-127"/>
-              </a:rPr>
-              <a:t>현재 활성화된 탭만 닫음 </a:t>
-            </a:r>
-            <a:r>
-              <a:rPr lang="en-US" altLang="ko-KR" sz="2000" dirty="0">
-                <a:latin typeface="Pretendard Light" panose="02000403000000020004" pitchFamily="2" charset="-127"/>
-                <a:ea typeface="Pretendard Light" panose="02000403000000020004" pitchFamily="2" charset="-127"/>
-                <a:cs typeface="Pretendard Light" panose="02000403000000020004" pitchFamily="2" charset="-127"/>
-              </a:rPr>
-              <a:t>(</a:t>
-            </a:r>
-            <a:r>
-              <a:rPr lang="ko-KR" altLang="en-US" sz="2000" dirty="0">
-                <a:latin typeface="Pretendard Light" panose="02000403000000020004" pitchFamily="2" charset="-127"/>
-                <a:ea typeface="Pretendard Light" panose="02000403000000020004" pitchFamily="2" charset="-127"/>
-                <a:cs typeface="Pretendard Light" panose="02000403000000020004" pitchFamily="2" charset="-127"/>
-              </a:rPr>
-              <a:t>다중 탭 제어 시 사용</a:t>
-            </a:r>
-            <a:r>
-              <a:rPr lang="en-US" altLang="ko-KR" sz="2000" dirty="0">
-                <a:latin typeface="Pretendard Light" panose="02000403000000020004" pitchFamily="2" charset="-127"/>
-                <a:ea typeface="Pretendard Light" panose="02000403000000020004" pitchFamily="2" charset="-127"/>
-                <a:cs typeface="Pretendard Light" panose="02000403000000020004" pitchFamily="2" charset="-127"/>
-              </a:rPr>
-              <a:t>)</a:t>
-            </a:r>
-          </a:p>
-        </p:txBody>
-      </p:sp>
       <p:pic>
         <p:nvPicPr>
           <p:cNvPr id="6" name="그림 5" descr="텍스트, 스크린샷, 폰트이(가) 표시된 사진&#10;&#10;AI 생성 콘텐츠는 정확하지 않을 수 있습니다.">
@@ -4016,6 +3896,126 @@
           </a:prstGeom>
         </p:spPr>
       </p:pic>
+      <p:sp>
+        <p:nvSpPr>
+          <p:cNvPr id="2" name="TextBox 1">
+            <a:extLst>
+              <a:ext uri="{FF2B5EF4-FFF2-40B4-BE49-F238E27FC236}">
+                <a16:creationId xmlns:a16="http://schemas.microsoft.com/office/drawing/2014/main" id="{AB73CEAB-44C0-E004-890B-539F3A0E1576}"/>
+              </a:ext>
+            </a:extLst>
+          </p:cNvPr>
+          <p:cNvSpPr txBox="1"/>
+          <p:nvPr/>
+        </p:nvSpPr>
+        <p:spPr>
+          <a:xfrm>
+            <a:off x="2548468" y="4293645"/>
+            <a:ext cx="6860608" cy="962508"/>
+          </a:xfrm>
+          <a:prstGeom prst="rect">
+            <a:avLst/>
+          </a:prstGeom>
+          <a:noFill/>
+        </p:spPr>
+        <p:txBody>
+          <a:bodyPr wrap="square">
+            <a:spAutoFit/>
+          </a:bodyPr>
+          <a:lstStyle/>
+          <a:p>
+            <a:pPr>
+              <a:lnSpc>
+                <a:spcPct val="150000"/>
+              </a:lnSpc>
+            </a:pPr>
+            <a:r>
+              <a:rPr lang="ko-KR" altLang="en-US" sz="2000" dirty="0">
+                <a:latin typeface="Pretendard Light" panose="02000403000000020004" pitchFamily="2" charset="-127"/>
+                <a:ea typeface="Pretendard Light" panose="02000403000000020004" pitchFamily="2" charset="-127"/>
+                <a:cs typeface="Pretendard Light" panose="02000403000000020004" pitchFamily="2" charset="-127"/>
+              </a:rPr>
+              <a:t>✔️ </a:t>
+            </a:r>
+            <a:r>
+              <a:rPr lang="en-US" altLang="ko-KR" sz="2000" dirty="0" err="1">
+                <a:latin typeface="Pretendard Light" panose="02000403000000020004" pitchFamily="2" charset="-127"/>
+                <a:ea typeface="Pretendard Light" panose="02000403000000020004" pitchFamily="2" charset="-127"/>
+                <a:cs typeface="Pretendard Light" panose="02000403000000020004" pitchFamily="2" charset="-127"/>
+              </a:rPr>
+              <a:t>driver.get</a:t>
+            </a:r>
+            <a:r>
+              <a:rPr lang="en-US" altLang="ko-KR" sz="2000" dirty="0">
+                <a:latin typeface="Pretendard Light" panose="02000403000000020004" pitchFamily="2" charset="-127"/>
+                <a:ea typeface="Pretendard Light" panose="02000403000000020004" pitchFamily="2" charset="-127"/>
+                <a:cs typeface="Pretendard Light" panose="02000403000000020004" pitchFamily="2" charset="-127"/>
+              </a:rPr>
+              <a:t>(</a:t>
+            </a:r>
+            <a:r>
+              <a:rPr lang="en-US" altLang="ko-KR" sz="2000" dirty="0" err="1">
+                <a:latin typeface="Pretendard Light" panose="02000403000000020004" pitchFamily="2" charset="-127"/>
+                <a:ea typeface="Pretendard Light" panose="02000403000000020004" pitchFamily="2" charset="-127"/>
+                <a:cs typeface="Pretendard Light" panose="02000403000000020004" pitchFamily="2" charset="-127"/>
+              </a:rPr>
+              <a:t>url</a:t>
+            </a:r>
+            <a:r>
+              <a:rPr lang="en-US" altLang="ko-KR" sz="2000" dirty="0">
+                <a:latin typeface="Pretendard Light" panose="02000403000000020004" pitchFamily="2" charset="-127"/>
+                <a:ea typeface="Pretendard Light" panose="02000403000000020004" pitchFamily="2" charset="-127"/>
+                <a:cs typeface="Pretendard Light" panose="02000403000000020004" pitchFamily="2" charset="-127"/>
+              </a:rPr>
+              <a:t>) : </a:t>
+            </a:r>
+            <a:r>
+              <a:rPr lang="ko-KR" altLang="en-US" sz="2000" dirty="0">
+                <a:latin typeface="Pretendard Light" panose="02000403000000020004" pitchFamily="2" charset="-127"/>
+                <a:ea typeface="Pretendard Light" panose="02000403000000020004" pitchFamily="2" charset="-127"/>
+                <a:cs typeface="Pretendard Light" panose="02000403000000020004" pitchFamily="2" charset="-127"/>
+              </a:rPr>
+              <a:t>해당 </a:t>
+            </a:r>
+            <a:r>
+              <a:rPr lang="en-US" altLang="ko-KR" sz="2000" dirty="0">
+                <a:latin typeface="Pretendard Light" panose="02000403000000020004" pitchFamily="2" charset="-127"/>
+                <a:ea typeface="Pretendard Light" panose="02000403000000020004" pitchFamily="2" charset="-127"/>
+                <a:cs typeface="Pretendard Light" panose="02000403000000020004" pitchFamily="2" charset="-127"/>
+              </a:rPr>
+              <a:t>URL</a:t>
+            </a:r>
+            <a:r>
+              <a:rPr lang="ko-KR" altLang="en-US" sz="2000" dirty="0">
+                <a:latin typeface="Pretendard Light" panose="02000403000000020004" pitchFamily="2" charset="-127"/>
+                <a:ea typeface="Pretendard Light" panose="02000403000000020004" pitchFamily="2" charset="-127"/>
+                <a:cs typeface="Pretendard Light" panose="02000403000000020004" pitchFamily="2" charset="-127"/>
+              </a:rPr>
+              <a:t>로 이동</a:t>
+            </a:r>
+          </a:p>
+          <a:p>
+            <a:pPr>
+              <a:lnSpc>
+                <a:spcPct val="150000"/>
+              </a:lnSpc>
+            </a:pPr>
+            <a:r>
+              <a:rPr lang="ko-KR" altLang="en-US" sz="2000" dirty="0">
+                <a:latin typeface="Pretendard Light" panose="02000403000000020004" pitchFamily="2" charset="-127"/>
+                <a:ea typeface="Pretendard Light" panose="02000403000000020004" pitchFamily="2" charset="-127"/>
+                <a:cs typeface="Pretendard Light" panose="02000403000000020004" pitchFamily="2" charset="-127"/>
+              </a:rPr>
+              <a:t>✔️ 페이지 로딩이 완료될 때까지 기다린 후 다음 코드 실행</a:t>
+            </a:r>
+            <a:endParaRPr lang="en-US" altLang="ko-KR" sz="2000" dirty="0">
+              <a:latin typeface="Pretendard Light" panose="02000403000000020004" pitchFamily="2" charset="-127"/>
+              <a:ea typeface="Pretendard Light" panose="02000403000000020004" pitchFamily="2" charset="-127"/>
+              <a:cs typeface="Pretendard Light" panose="02000403000000020004" pitchFamily="2" charset="-127"/>
+            </a:endParaRPr>
+          </a:p>
+        </p:txBody>
+      </p:sp>
     </p:spTree>
     <p:extLst>
       <p:ext uri="{BB962C8B-B14F-4D97-AF65-F5344CB8AC3E}">
@@ -11604,7 +11604,7 @@
           <a:p>
             <a:fld id="{0F78D9C4-20C1-4B15-A116-16DC77AD9A1E}" type="datetime1">
               <a:rPr lang="ko-KR" altLang="en-US" smtClean="0"/>
-              <a:t>2025-09-01</a:t>
+              <a:t>2025-12-12</a:t>
             </a:fld>
             <a:endParaRPr lang="ko-KR" altLang="en-US" dirty="0"/>
           </a:p>
